--- a/docs/Raw/sals3_item_problem_return_refund_sop_2026-08-31.pptx
+++ b/docs/Raw/sals3_item_problem_return_refund_sop_2026-08-31.pptx
@@ -3068,7 +3068,7 @@
                       </a:endParaRPr>
                     </a:p>
                   </a:txBody>
-                  <a:tcPr marL="64008" marR="64008" marT="64008" marB="64008" anchor="ctr">
+                  <a:tcPr marL="64008" marR="64008" marT="64008" marB="64008" anchor="mid">
                     <a:lnL w="8890" cap="flat" cmpd="sng" algn="ctr">
                       <a:solidFill>
                         <a:srgbClr val="D7DCE2"/>
@@ -3136,7 +3136,7 @@
                       </a:endParaRPr>
                     </a:p>
                   </a:txBody>
-                  <a:tcPr marL="64008" marR="64008" marT="64008" marB="64008" anchor="ctr">
+                  <a:tcPr marL="64008" marR="64008" marT="64008" marB="64008" anchor="mid">
                     <a:lnL w="8890" cap="flat" cmpd="sng" algn="ctr">
                       <a:solidFill>
                         <a:srgbClr val="D7DCE2"/>
@@ -3206,7 +3206,7 @@
                       </a:endParaRPr>
                     </a:p>
                   </a:txBody>
-                  <a:tcPr marL="64008" marR="64008" marT="64008" marB="64008" anchor="ctr">
+                  <a:tcPr marL="64008" marR="64008" marT="64008" marB="64008" anchor="mid">
                     <a:lnL w="8890" cap="flat" cmpd="sng" algn="ctr">
                       <a:solidFill>
                         <a:srgbClr val="D7DCE2"/>
@@ -3274,7 +3274,7 @@
                       </a:endParaRPr>
                     </a:p>
                   </a:txBody>
-                  <a:tcPr marL="64008" marR="64008" marT="64008" marB="64008" anchor="ctr">
+                  <a:tcPr marL="64008" marR="64008" marT="64008" marB="64008" anchor="mid">
                     <a:lnL w="8890" cap="flat" cmpd="sng" algn="ctr">
                       <a:solidFill>
                         <a:srgbClr val="D7DCE2"/>
@@ -3344,7 +3344,7 @@
                       </a:endParaRPr>
                     </a:p>
                   </a:txBody>
-                  <a:tcPr marL="64008" marR="64008" marT="64008" marB="64008" anchor="ctr">
+                  <a:tcPr marL="64008" marR="64008" marT="64008" marB="64008" anchor="mid">
                     <a:lnL w="8890" cap="flat" cmpd="sng" algn="ctr">
                       <a:solidFill>
                         <a:srgbClr val="D7DCE2"/>
@@ -3412,7 +3412,7 @@
                       </a:endParaRPr>
                     </a:p>
                   </a:txBody>
-                  <a:tcPr marL="64008" marR="64008" marT="64008" marB="64008" anchor="ctr">
+                  <a:tcPr marL="64008" marR="64008" marT="64008" marB="64008" anchor="mid">
                     <a:lnL w="8890" cap="flat" cmpd="sng" algn="ctr">
                       <a:solidFill>
                         <a:srgbClr val="D7DCE2"/>
@@ -3482,7 +3482,7 @@
                       </a:endParaRPr>
                     </a:p>
                   </a:txBody>
-                  <a:tcPr marL="64008" marR="64008" marT="64008" marB="64008" anchor="ctr">
+                  <a:tcPr marL="64008" marR="64008" marT="64008" marB="64008" anchor="mid">
                     <a:lnL w="8890" cap="flat" cmpd="sng" algn="ctr">
                       <a:solidFill>
                         <a:srgbClr val="D7DCE2"/>
@@ -3550,7 +3550,7 @@
                       </a:endParaRPr>
                     </a:p>
                   </a:txBody>
-                  <a:tcPr marL="64008" marR="64008" marT="64008" marB="64008" anchor="ctr">
+                  <a:tcPr marL="64008" marR="64008" marT="64008" marB="64008" anchor="mid">
                     <a:lnL w="8890" cap="flat" cmpd="sng" algn="ctr">
                       <a:solidFill>
                         <a:srgbClr val="D7DCE2"/>
@@ -3620,7 +3620,7 @@
                       </a:endParaRPr>
                     </a:p>
                   </a:txBody>
-                  <a:tcPr marL="64008" marR="64008" marT="64008" marB="64008" anchor="ctr">
+                  <a:tcPr marL="64008" marR="64008" marT="64008" marB="64008" anchor="mid">
                     <a:lnL w="8890" cap="flat" cmpd="sng" algn="ctr">
                       <a:solidFill>
                         <a:srgbClr val="D7DCE2"/>
@@ -3688,7 +3688,7 @@
                       </a:endParaRPr>
                     </a:p>
                   </a:txBody>
-                  <a:tcPr marL="64008" marR="64008" marT="64008" marB="64008" anchor="ctr">
+                  <a:tcPr marL="64008" marR="64008" marT="64008" marB="64008" anchor="mid">
                     <a:lnL w="8890" cap="flat" cmpd="sng" algn="ctr">
                       <a:solidFill>
                         <a:srgbClr val="D7DCE2"/>
@@ -3758,7 +3758,7 @@
                       </a:endParaRPr>
                     </a:p>
                   </a:txBody>
-                  <a:tcPr marL="64008" marR="64008" marT="64008" marB="64008" anchor="ctr">
+                  <a:tcPr marL="64008" marR="64008" marT="64008" marB="64008" anchor="mid">
                     <a:lnL w="8890" cap="flat" cmpd="sng" algn="ctr">
                       <a:solidFill>
                         <a:srgbClr val="D7DCE2"/>
@@ -3826,7 +3826,7 @@
                       </a:endParaRPr>
                     </a:p>
                   </a:txBody>
-                  <a:tcPr marL="64008" marR="64008" marT="64008" marB="64008" anchor="ctr">
+                  <a:tcPr marL="64008" marR="64008" marT="64008" marB="64008" anchor="mid">
                     <a:lnL w="8890" cap="flat" cmpd="sng" algn="ctr">
                       <a:solidFill>
                         <a:srgbClr val="D7DCE2"/>
@@ -4046,7 +4046,7 @@
       </p:sp>
       <p:sp>
         <p:nvSpPr>
-          <p:cNvPr id="14" name="Text 8"/>
+          <p:cNvPr id="12" name="Text 8"/>
           <p:cNvSpPr/>
           <p:nvPr/>
         </p:nvSpPr>
@@ -4997,7 +4997,21 @@
                   <a:srgbClr val="5B6472"/>
                 </a:solidFill>
               </a:rPr>
-              <a:t>Defective or not working (includes safety or hazard concern)</a:t>
+              <a:t>Defective or not working</a:t>
+            </a:r>
+            <a:endParaRPr lang="en-US" sz="900" dirty="0"/>
+          </a:p>
+          <a:p>
+            <a:pPr indent="0" marL="0">
+              <a:buNone/>
+            </a:pPr>
+            <a:r>
+              <a:rPr lang="en-US" sz="900" dirty="0">
+                <a:solidFill>
+                  <a:srgbClr val="5B6472"/>
+                </a:solidFill>
+              </a:rPr>
+              <a:t>Includes safety or hazard concern</a:t>
             </a:r>
             <a:endParaRPr lang="en-US" sz="900" dirty="0"/>
           </a:p>
@@ -5143,20 +5157,6 @@
                 </a:solidFill>
               </a:rPr>
               <a:t>Change of mind</a:t>
-            </a:r>
-            <a:endParaRPr lang="en-US" sz="900" dirty="0"/>
-          </a:p>
-          <a:p>
-            <a:pPr indent="0" marL="0">
-              <a:buNone/>
-            </a:pPr>
-            <a:r>
-              <a:rPr lang="en-US" sz="900" dirty="0">
-                <a:solidFill>
-                  <a:srgbClr val="5B6472"/>
-                </a:solidFill>
-              </a:rPr>
-              <a:t>Not as described (standalone listing-match claims)</a:t>
             </a:r>
             <a:endParaRPr lang="en-US" sz="900" dirty="0"/>
           </a:p>
@@ -5455,7 +5455,7 @@
       </p:sp>
       <p:graphicFrame>
         <p:nvGraphicFramePr>
-          <p:cNvPr id="12" name="Table 0"/>
+          <p:cNvPr id="4" name="Table 0"/>
           <p:cNvGraphicFramePr>
             <a:graphicFrameLocks noGrp="1"/>
           </p:cNvGraphicFramePr>
@@ -5507,7 +5507,7 @@
                       </a:endParaRPr>
                     </a:p>
                   </a:txBody>
-                  <a:tcPr marL="64008" marR="64008" marT="64008" marB="64008" anchor="ctr">
+                  <a:tcPr marL="64008" marR="64008" marT="64008" marB="64008" anchor="mid">
                     <a:lnL w="8890" cap="flat" cmpd="sng" algn="ctr">
                       <a:solidFill>
                         <a:srgbClr val="D7DCE2"/>
@@ -5575,7 +5575,7 @@
                       </a:endParaRPr>
                     </a:p>
                   </a:txBody>
-                  <a:tcPr marL="64008" marR="64008" marT="64008" marB="64008" anchor="ctr">
+                  <a:tcPr marL="64008" marR="64008" marT="64008" marB="64008" anchor="mid">
                     <a:lnL w="8890" cap="flat" cmpd="sng" algn="ctr">
                       <a:solidFill>
                         <a:srgbClr val="D7DCE2"/>
@@ -5643,7 +5643,7 @@
                       </a:endParaRPr>
                     </a:p>
                   </a:txBody>
-                  <a:tcPr marL="64008" marR="64008" marT="64008" marB="64008" anchor="ctr">
+                  <a:tcPr marL="64008" marR="64008" marT="64008" marB="64008" anchor="mid">
                     <a:lnL w="8890" cap="flat" cmpd="sng" algn="ctr">
                       <a:solidFill>
                         <a:srgbClr val="D7DCE2"/>
@@ -5713,7 +5713,7 @@
                       </a:endParaRPr>
                     </a:p>
                   </a:txBody>
-                  <a:tcPr marL="64008" marR="64008" marT="64008" marB="64008" anchor="ctr">
+                  <a:tcPr marL="64008" marR="64008" marT="64008" marB="64008" anchor="mid">
                     <a:lnL w="8890" cap="flat" cmpd="sng" algn="ctr">
                       <a:solidFill>
                         <a:srgbClr val="D7DCE2"/>
@@ -5781,7 +5781,7 @@
                       </a:endParaRPr>
                     </a:p>
                   </a:txBody>
-                  <a:tcPr marL="64008" marR="64008" marT="64008" marB="64008" anchor="ctr">
+                  <a:tcPr marL="64008" marR="64008" marT="64008" marB="64008" anchor="mid">
                     <a:lnL w="8890" cap="flat" cmpd="sng" algn="ctr">
                       <a:solidFill>
                         <a:srgbClr val="D7DCE2"/>
@@ -5849,7 +5849,7 @@
                       </a:endParaRPr>
                     </a:p>
                   </a:txBody>
-                  <a:tcPr marL="64008" marR="64008" marT="64008" marB="64008" anchor="ctr">
+                  <a:tcPr marL="64008" marR="64008" marT="64008" marB="64008" anchor="mid">
                     <a:lnL w="8890" cap="flat" cmpd="sng" algn="ctr">
                       <a:solidFill>
                         <a:srgbClr val="D7DCE2"/>
@@ -5919,7 +5919,7 @@
                       </a:endParaRPr>
                     </a:p>
                   </a:txBody>
-                  <a:tcPr marL="64008" marR="64008" marT="64008" marB="64008" anchor="ctr">
+                  <a:tcPr marL="64008" marR="64008" marT="64008" marB="64008" anchor="mid">
                     <a:lnL w="8890" cap="flat" cmpd="sng" algn="ctr">
                       <a:solidFill>
                         <a:srgbClr val="D7DCE2"/>
@@ -5987,7 +5987,7 @@
                       </a:endParaRPr>
                     </a:p>
                   </a:txBody>
-                  <a:tcPr marL="64008" marR="64008" marT="64008" marB="64008" anchor="ctr">
+                  <a:tcPr marL="64008" marR="64008" marT="64008" marB="64008" anchor="mid">
                     <a:lnL w="8890" cap="flat" cmpd="sng" algn="ctr">
                       <a:solidFill>
                         <a:srgbClr val="D7DCE2"/>
@@ -6055,7 +6055,7 @@
                       </a:endParaRPr>
                     </a:p>
                   </a:txBody>
-                  <a:tcPr marL="64008" marR="64008" marT="64008" marB="64008" anchor="ctr">
+                  <a:tcPr marL="64008" marR="64008" marT="64008" marB="64008" anchor="mid">
                     <a:lnL w="8890" cap="flat" cmpd="sng" algn="ctr">
                       <a:solidFill>
                         <a:srgbClr val="D7DCE2"/>
@@ -6125,7 +6125,7 @@
                       </a:endParaRPr>
                     </a:p>
                   </a:txBody>
-                  <a:tcPr marL="64008" marR="64008" marT="64008" marB="64008" anchor="ctr">
+                  <a:tcPr marL="64008" marR="64008" marT="64008" marB="64008" anchor="mid">
                     <a:lnL w="8890" cap="flat" cmpd="sng" algn="ctr">
                       <a:solidFill>
                         <a:srgbClr val="D7DCE2"/>
@@ -6193,7 +6193,7 @@
                       </a:endParaRPr>
                     </a:p>
                   </a:txBody>
-                  <a:tcPr marL="64008" marR="64008" marT="64008" marB="64008" anchor="ctr">
+                  <a:tcPr marL="64008" marR="64008" marT="64008" marB="64008" anchor="mid">
                     <a:lnL w="8890" cap="flat" cmpd="sng" algn="ctr">
                       <a:solidFill>
                         <a:srgbClr val="D7DCE2"/>
@@ -6261,7 +6261,7 @@
                       </a:endParaRPr>
                     </a:p>
                   </a:txBody>
-                  <a:tcPr marL="64008" marR="64008" marT="64008" marB="64008" anchor="ctr">
+                  <a:tcPr marL="64008" marR="64008" marT="64008" marB="64008" anchor="mid">
                     <a:lnL w="8890" cap="flat" cmpd="sng" algn="ctr">
                       <a:solidFill>
                         <a:srgbClr val="D7DCE2"/>
@@ -6331,7 +6331,7 @@
                       </a:endParaRPr>
                     </a:p>
                   </a:txBody>
-                  <a:tcPr marL="64008" marR="64008" marT="64008" marB="64008" anchor="ctr">
+                  <a:tcPr marL="64008" marR="64008" marT="64008" marB="64008" anchor="mid">
                     <a:lnL w="8890" cap="flat" cmpd="sng" algn="ctr">
                       <a:solidFill>
                         <a:srgbClr val="D7DCE2"/>
@@ -6399,7 +6399,7 @@
                       </a:endParaRPr>
                     </a:p>
                   </a:txBody>
-                  <a:tcPr marL="64008" marR="64008" marT="64008" marB="64008" anchor="ctr">
+                  <a:tcPr marL="64008" marR="64008" marT="64008" marB="64008" anchor="mid">
                     <a:lnL w="8890" cap="flat" cmpd="sng" algn="ctr">
                       <a:solidFill>
                         <a:srgbClr val="D7DCE2"/>
@@ -6467,7 +6467,7 @@
                       </a:endParaRPr>
                     </a:p>
                   </a:txBody>
-                  <a:tcPr marL="64008" marR="64008" marT="64008" marB="64008" anchor="ctr">
+                  <a:tcPr marL="64008" marR="64008" marT="64008" marB="64008" anchor="mid">
                     <a:lnL w="8890" cap="flat" cmpd="sng" algn="ctr">
                       <a:solidFill>
                         <a:srgbClr val="D7DCE2"/>
@@ -6838,7 +6838,7 @@
       </p:sp>
       <p:graphicFrame>
         <p:nvGraphicFramePr>
-          <p:cNvPr id="15" name="Table 0"/>
+          <p:cNvPr id="5" name="Table 0"/>
           <p:cNvGraphicFramePr>
             <a:graphicFrameLocks noGrp="1"/>
           </p:cNvGraphicFramePr>
@@ -6889,7 +6889,7 @@
                       </a:endParaRPr>
                     </a:p>
                   </a:txBody>
-                  <a:tcPr marL="64008" marR="64008" marT="64008" marB="64008" anchor="ctr">
+                  <a:tcPr marL="64008" marR="64008" marT="64008" marB="64008" anchor="mid">
                     <a:lnL w="8890" cap="flat" cmpd="sng" algn="ctr">
                       <a:solidFill>
                         <a:srgbClr val="D7DCE2"/>
@@ -6957,7 +6957,7 @@
                       </a:endParaRPr>
                     </a:p>
                   </a:txBody>
-                  <a:tcPr marL="64008" marR="64008" marT="64008" marB="64008" anchor="ctr">
+                  <a:tcPr marL="64008" marR="64008" marT="64008" marB="64008" anchor="mid">
                     <a:lnL w="8890" cap="flat" cmpd="sng" algn="ctr">
                       <a:solidFill>
                         <a:srgbClr val="D7DCE2"/>
@@ -7027,7 +7027,7 @@
                       </a:endParaRPr>
                     </a:p>
                   </a:txBody>
-                  <a:tcPr marL="64008" marR="64008" marT="64008" marB="64008" anchor="ctr">
+                  <a:tcPr marL="64008" marR="64008" marT="64008" marB="64008" anchor="mid">
                     <a:lnL w="8890" cap="flat" cmpd="sng" algn="ctr">
                       <a:solidFill>
                         <a:srgbClr val="D7DCE2"/>
@@ -7095,7 +7095,7 @@
                       </a:endParaRPr>
                     </a:p>
                   </a:txBody>
-                  <a:tcPr marL="64008" marR="64008" marT="64008" marB="64008" anchor="ctr">
+                  <a:tcPr marL="64008" marR="64008" marT="64008" marB="64008" anchor="mid">
                     <a:lnL w="8890" cap="flat" cmpd="sng" algn="ctr">
                       <a:solidFill>
                         <a:srgbClr val="D7DCE2"/>
@@ -7165,7 +7165,7 @@
                       </a:endParaRPr>
                     </a:p>
                   </a:txBody>
-                  <a:tcPr marL="64008" marR="64008" marT="64008" marB="64008" anchor="ctr">
+                  <a:tcPr marL="64008" marR="64008" marT="64008" marB="64008" anchor="mid">
                     <a:lnL w="8890" cap="flat" cmpd="sng" algn="ctr">
                       <a:solidFill>
                         <a:srgbClr val="D7DCE2"/>
@@ -7233,7 +7233,7 @@
                       </a:endParaRPr>
                     </a:p>
                   </a:txBody>
-                  <a:tcPr marL="64008" marR="64008" marT="64008" marB="64008" anchor="ctr">
+                  <a:tcPr marL="64008" marR="64008" marT="64008" marB="64008" anchor="mid">
                     <a:lnL w="8890" cap="flat" cmpd="sng" algn="ctr">
                       <a:solidFill>
                         <a:srgbClr val="D7DCE2"/>
@@ -7333,7 +7333,7 @@
                       </a:endParaRPr>
                     </a:p>
                   </a:txBody>
-                  <a:tcPr marL="64008" marR="64008" marT="64008" marB="64008" anchor="ctr">
+                  <a:tcPr marL="64008" marR="64008" marT="64008" marB="64008" anchor="mid">
                     <a:lnL w="8890" cap="flat" cmpd="sng" algn="ctr">
                       <a:solidFill>
                         <a:srgbClr val="D7DCE2"/>
@@ -7401,7 +7401,7 @@
                       </a:endParaRPr>
                     </a:p>
                   </a:txBody>
-                  <a:tcPr marL="64008" marR="64008" marT="64008" marB="64008" anchor="ctr">
+                  <a:tcPr marL="64008" marR="64008" marT="64008" marB="64008" anchor="mid">
                     <a:lnL w="8890" cap="flat" cmpd="sng" algn="ctr">
                       <a:solidFill>
                         <a:srgbClr val="D7DCE2"/>
@@ -7471,7 +7471,7 @@
                       </a:endParaRPr>
                     </a:p>
                   </a:txBody>
-                  <a:tcPr marL="64008" marR="64008" marT="64008" marB="64008" anchor="ctr">
+                  <a:tcPr marL="64008" marR="64008" marT="64008" marB="64008" anchor="mid">
                     <a:lnL w="8890" cap="flat" cmpd="sng" algn="ctr">
                       <a:solidFill>
                         <a:srgbClr val="D7DCE2"/>
@@ -7539,7 +7539,7 @@
                       </a:endParaRPr>
                     </a:p>
                   </a:txBody>
-                  <a:tcPr marL="64008" marR="64008" marT="64008" marB="64008" anchor="ctr">
+                  <a:tcPr marL="64008" marR="64008" marT="64008" marB="64008" anchor="mid">
                     <a:lnL w="8890" cap="flat" cmpd="sng" algn="ctr">
                       <a:solidFill>
                         <a:srgbClr val="D7DCE2"/>
@@ -7609,7 +7609,7 @@
                       </a:endParaRPr>
                     </a:p>
                   </a:txBody>
-                  <a:tcPr marL="64008" marR="64008" marT="64008" marB="64008" anchor="ctr">
+                  <a:tcPr marL="64008" marR="64008" marT="64008" marB="64008" anchor="mid">
                     <a:lnL w="8890" cap="flat" cmpd="sng" algn="ctr">
                       <a:solidFill>
                         <a:srgbClr val="D7DCE2"/>
@@ -7677,7 +7677,7 @@
                       </a:endParaRPr>
                     </a:p>
                   </a:txBody>
-                  <a:tcPr marL="64008" marR="64008" marT="64008" marB="64008" anchor="ctr">
+                  <a:tcPr marL="64008" marR="64008" marT="64008" marB="64008" anchor="mid">
                     <a:lnL w="8890" cap="flat" cmpd="sng" algn="ctr">
                       <a:solidFill>
                         <a:srgbClr val="D7DCE2"/>
@@ -7747,7 +7747,7 @@
                       </a:endParaRPr>
                     </a:p>
                   </a:txBody>
-                  <a:tcPr marL="64008" marR="64008" marT="64008" marB="64008" anchor="ctr">
+                  <a:tcPr marL="64008" marR="64008" marT="64008" marB="64008" anchor="mid">
                     <a:lnL w="8890" cap="flat" cmpd="sng" algn="ctr">
                       <a:solidFill>
                         <a:srgbClr val="D7DCE2"/>
@@ -7815,7 +7815,7 @@
                       </a:endParaRPr>
                     </a:p>
                   </a:txBody>
-                  <a:tcPr marL="64008" marR="64008" marT="64008" marB="64008" anchor="ctr">
+                  <a:tcPr marL="64008" marR="64008" marT="64008" marB="64008" anchor="mid">
                     <a:lnL w="8890" cap="flat" cmpd="sng" algn="ctr">
                       <a:solidFill>
                         <a:srgbClr val="D7DCE2"/>
@@ -7885,7 +7885,7 @@
                       </a:endParaRPr>
                     </a:p>
                   </a:txBody>
-                  <a:tcPr marL="64008" marR="64008" marT="64008" marB="64008" anchor="ctr">
+                  <a:tcPr marL="64008" marR="64008" marT="64008" marB="64008" anchor="mid">
                     <a:lnL w="8890" cap="flat" cmpd="sng" algn="ctr">
                       <a:solidFill>
                         <a:srgbClr val="D7DCE2"/>
@@ -7953,7 +7953,7 @@
                       </a:endParaRPr>
                     </a:p>
                   </a:txBody>
-                  <a:tcPr marL="64008" marR="64008" marT="64008" marB="64008" anchor="ctr">
+                  <a:tcPr marL="64008" marR="64008" marT="64008" marB="64008" anchor="mid">
                     <a:lnL w="8890" cap="flat" cmpd="sng" algn="ctr">
                       <a:solidFill>
                         <a:srgbClr val="D7DCE2"/>
@@ -8038,7 +8038,7 @@
       </p:sp>
       <p:sp>
         <p:nvSpPr>
-          <p:cNvPr id="16" name="Text 4"/>
+          <p:cNvPr id="9" name="Text 4"/>
           <p:cNvSpPr/>
           <p:nvPr/>
         </p:nvSpPr>
@@ -8434,7 +8434,7 @@
       </p:sp>
       <p:graphicFrame>
         <p:nvGraphicFramePr>
-          <p:cNvPr id="12" name="Table 0"/>
+          <p:cNvPr id="6" name="Table 0"/>
           <p:cNvGraphicFramePr>
             <a:graphicFrameLocks noGrp="1"/>
           </p:cNvGraphicFramePr>
@@ -8485,7 +8485,7 @@
                       </a:endParaRPr>
                     </a:p>
                   </a:txBody>
-                  <a:tcPr marL="64008" marR="64008" marT="64008" marB="64008" anchor="ctr">
+                  <a:tcPr marL="64008" marR="64008" marT="64008" marB="64008" anchor="mid">
                     <a:lnL w="8890" cap="flat" cmpd="sng" algn="ctr">
                       <a:solidFill>
                         <a:srgbClr val="D7DCE2"/>
@@ -8553,7 +8553,7 @@
                       </a:endParaRPr>
                     </a:p>
                   </a:txBody>
-                  <a:tcPr marL="64008" marR="64008" marT="64008" marB="64008" anchor="ctr">
+                  <a:tcPr marL="64008" marR="64008" marT="64008" marB="64008" anchor="mid">
                     <a:lnL w="8890" cap="flat" cmpd="sng" algn="ctr">
                       <a:solidFill>
                         <a:srgbClr val="D7DCE2"/>
@@ -8623,7 +8623,7 @@
                       </a:endParaRPr>
                     </a:p>
                   </a:txBody>
-                  <a:tcPr marL="64008" marR="64008" marT="64008" marB="64008" anchor="ctr">
+                  <a:tcPr marL="64008" marR="64008" marT="64008" marB="64008" anchor="mid">
                     <a:lnL w="8890" cap="flat" cmpd="sng" algn="ctr">
                       <a:solidFill>
                         <a:srgbClr val="D7DCE2"/>
@@ -8691,7 +8691,7 @@
                       </a:endParaRPr>
                     </a:p>
                   </a:txBody>
-                  <a:tcPr marL="64008" marR="64008" marT="64008" marB="64008" anchor="ctr">
+                  <a:tcPr marL="64008" marR="64008" marT="64008" marB="64008" anchor="mid">
                     <a:lnL w="8890" cap="flat" cmpd="sng" algn="ctr">
                       <a:solidFill>
                         <a:srgbClr val="D7DCE2"/>
@@ -8761,7 +8761,7 @@
                       </a:endParaRPr>
                     </a:p>
                   </a:txBody>
-                  <a:tcPr marL="64008" marR="64008" marT="64008" marB="64008" anchor="ctr">
+                  <a:tcPr marL="64008" marR="64008" marT="64008" marB="64008" anchor="mid">
                     <a:lnL w="8890" cap="flat" cmpd="sng" algn="ctr">
                       <a:solidFill>
                         <a:srgbClr val="D7DCE2"/>
@@ -8829,7 +8829,7 @@
                       </a:endParaRPr>
                     </a:p>
                   </a:txBody>
-                  <a:tcPr marL="64008" marR="64008" marT="64008" marB="64008" anchor="ctr">
+                  <a:tcPr marL="64008" marR="64008" marT="64008" marB="64008" anchor="mid">
                     <a:lnL w="8890" cap="flat" cmpd="sng" algn="ctr">
                       <a:solidFill>
                         <a:srgbClr val="D7DCE2"/>
@@ -8899,7 +8899,7 @@
                       </a:endParaRPr>
                     </a:p>
                   </a:txBody>
-                  <a:tcPr marL="64008" marR="64008" marT="64008" marB="64008" anchor="ctr">
+                  <a:tcPr marL="64008" marR="64008" marT="64008" marB="64008" anchor="mid">
                     <a:lnL w="8890" cap="flat" cmpd="sng" algn="ctr">
                       <a:solidFill>
                         <a:srgbClr val="D7DCE2"/>
@@ -8967,7 +8967,7 @@
                       </a:endParaRPr>
                     </a:p>
                   </a:txBody>
-                  <a:tcPr marL="64008" marR="64008" marT="64008" marB="64008" anchor="ctr">
+                  <a:tcPr marL="64008" marR="64008" marT="64008" marB="64008" anchor="mid">
                     <a:lnL w="8890" cap="flat" cmpd="sng" algn="ctr">
                       <a:solidFill>
                         <a:srgbClr val="D7DCE2"/>
@@ -9037,7 +9037,7 @@
                       </a:endParaRPr>
                     </a:p>
                   </a:txBody>
-                  <a:tcPr marL="64008" marR="64008" marT="64008" marB="64008" anchor="ctr">
+                  <a:tcPr marL="64008" marR="64008" marT="64008" marB="64008" anchor="mid">
                     <a:lnL w="8890" cap="flat" cmpd="sng" algn="ctr">
                       <a:solidFill>
                         <a:srgbClr val="D7DCE2"/>
@@ -9105,7 +9105,7 @@
                       </a:endParaRPr>
                     </a:p>
                   </a:txBody>
-                  <a:tcPr marL="64008" marR="64008" marT="64008" marB="64008" anchor="ctr">
+                  <a:tcPr marL="64008" marR="64008" marT="64008" marB="64008" anchor="mid">
                     <a:lnL w="8890" cap="flat" cmpd="sng" algn="ctr">
                       <a:solidFill>
                         <a:srgbClr val="D7DCE2"/>
@@ -9175,7 +9175,7 @@
                       </a:endParaRPr>
                     </a:p>
                   </a:txBody>
-                  <a:tcPr marL="64008" marR="64008" marT="64008" marB="64008" anchor="ctr">
+                  <a:tcPr marL="64008" marR="64008" marT="64008" marB="64008" anchor="mid">
                     <a:lnL w="8890" cap="flat" cmpd="sng" algn="ctr">
                       <a:solidFill>
                         <a:srgbClr val="D7DCE2"/>
@@ -9243,7 +9243,7 @@
                       </a:endParaRPr>
                     </a:p>
                   </a:txBody>
-                  <a:tcPr marL="64008" marR="64008" marT="64008" marB="64008" anchor="ctr">
+                  <a:tcPr marL="64008" marR="64008" marT="64008" marB="64008" anchor="mid">
                     <a:lnL w="8890" cap="flat" cmpd="sng" algn="ctr">
                       <a:solidFill>
                         <a:srgbClr val="D7DCE2"/>
@@ -9313,7 +9313,7 @@
                       </a:endParaRPr>
                     </a:p>
                   </a:txBody>
-                  <a:tcPr marL="64008" marR="64008" marT="64008" marB="64008" anchor="ctr">
+                  <a:tcPr marL="64008" marR="64008" marT="64008" marB="64008" anchor="mid">
                     <a:lnL w="8890" cap="flat" cmpd="sng" algn="ctr">
                       <a:solidFill>
                         <a:srgbClr val="D7DCE2"/>
@@ -9381,7 +9381,7 @@
                       </a:endParaRPr>
                     </a:p>
                   </a:txBody>
-                  <a:tcPr marL="64008" marR="64008" marT="64008" marB="64008" anchor="ctr">
+                  <a:tcPr marL="64008" marR="64008" marT="64008" marB="64008" anchor="mid">
                     <a:lnL w="8890" cap="flat" cmpd="sng" algn="ctr">
                       <a:solidFill>
                         <a:srgbClr val="D7DCE2"/>
@@ -9451,7 +9451,7 @@
                       </a:endParaRPr>
                     </a:p>
                   </a:txBody>
-                  <a:tcPr marL="64008" marR="64008" marT="64008" marB="64008" anchor="ctr">
+                  <a:tcPr marL="64008" marR="64008" marT="64008" marB="64008" anchor="mid">
                     <a:lnL w="8890" cap="flat" cmpd="sng" algn="ctr">
                       <a:solidFill>
                         <a:srgbClr val="D7DCE2"/>
@@ -9519,7 +9519,7 @@
                       </a:endParaRPr>
                     </a:p>
                   </a:txBody>
-                  <a:tcPr marL="64008" marR="64008" marT="64008" marB="64008" anchor="ctr">
+                  <a:tcPr marL="64008" marR="64008" marT="64008" marB="64008" anchor="mid">
                     <a:lnL w="8890" cap="flat" cmpd="sng" algn="ctr">
                       <a:solidFill>
                         <a:srgbClr val="D7DCE2"/>
@@ -9589,7 +9589,7 @@
                       </a:endParaRPr>
                     </a:p>
                   </a:txBody>
-                  <a:tcPr marL="64008" marR="64008" marT="64008" marB="64008" anchor="ctr">
+                  <a:tcPr marL="64008" marR="64008" marT="64008" marB="64008" anchor="mid">
                     <a:lnL w="8890" cap="flat" cmpd="sng" algn="ctr">
                       <a:solidFill>
                         <a:srgbClr val="D7DCE2"/>
@@ -9657,7 +9657,7 @@
                       </a:endParaRPr>
                     </a:p>
                   </a:txBody>
-                  <a:tcPr marL="64008" marR="64008" marT="64008" marB="64008" anchor="ctr">
+                  <a:tcPr marL="64008" marR="64008" marT="64008" marB="64008" anchor="mid">
                     <a:lnL w="8890" cap="flat" cmpd="sng" algn="ctr">
                       <a:solidFill>
                         <a:srgbClr val="D7DCE2"/>
@@ -9727,7 +9727,7 @@
                       </a:endParaRPr>
                     </a:p>
                   </a:txBody>
-                  <a:tcPr marL="64008" marR="64008" marT="64008" marB="64008" anchor="ctr">
+                  <a:tcPr marL="64008" marR="64008" marT="64008" marB="64008" anchor="mid">
                     <a:lnL w="8890" cap="flat" cmpd="sng" algn="ctr">
                       <a:solidFill>
                         <a:srgbClr val="D7DCE2"/>
@@ -9795,7 +9795,7 @@
                       </a:endParaRPr>
                     </a:p>
                   </a:txBody>
-                  <a:tcPr marL="64008" marR="64008" marT="64008" marB="64008" anchor="ctr">
+                  <a:tcPr marL="64008" marR="64008" marT="64008" marB="64008" anchor="mid">
                     <a:lnL w="8890" cap="flat" cmpd="sng" algn="ctr">
                       <a:solidFill>
                         <a:srgbClr val="D7DCE2"/>
@@ -10222,7 +10222,7 @@
                       </a:endParaRPr>
                     </a:p>
                   </a:txBody>
-                  <a:tcPr marL="64008" marR="64008" marT="64008" marB="64008" anchor="ctr">
+                  <a:tcPr marL="64008" marR="64008" marT="64008" marB="64008" anchor="mid">
                     <a:lnL w="8890" cap="flat" cmpd="sng" algn="ctr">
                       <a:solidFill>
                         <a:srgbClr val="D7DCE2"/>
@@ -10290,7 +10290,7 @@
                       </a:endParaRPr>
                     </a:p>
                   </a:txBody>
-                  <a:tcPr marL="64008" marR="64008" marT="64008" marB="64008" anchor="ctr">
+                  <a:tcPr marL="64008" marR="64008" marT="64008" marB="64008" anchor="mid">
                     <a:lnL w="8890" cap="flat" cmpd="sng" algn="ctr">
                       <a:solidFill>
                         <a:srgbClr val="D7DCE2"/>
@@ -10358,7 +10358,7 @@
                       </a:endParaRPr>
                     </a:p>
                   </a:txBody>
-                  <a:tcPr marL="64008" marR="64008" marT="64008" marB="64008" anchor="ctr">
+                  <a:tcPr marL="64008" marR="64008" marT="64008" marB="64008" anchor="mid">
                     <a:lnL w="8890" cap="flat" cmpd="sng" algn="ctr">
                       <a:solidFill>
                         <a:srgbClr val="D7DCE2"/>
@@ -10426,7 +10426,7 @@
                       </a:endParaRPr>
                     </a:p>
                   </a:txBody>
-                  <a:tcPr marL="64008" marR="64008" marT="64008" marB="64008" anchor="ctr">
+                  <a:tcPr marL="64008" marR="64008" marT="64008" marB="64008" anchor="mid">
                     <a:lnL w="8890" cap="flat" cmpd="sng" algn="ctr">
                       <a:solidFill>
                         <a:srgbClr val="D7DCE2"/>
@@ -10496,7 +10496,7 @@
                       </a:endParaRPr>
                     </a:p>
                   </a:txBody>
-                  <a:tcPr marL="64008" marR="64008" marT="64008" marB="64008" anchor="ctr">
+                  <a:tcPr marL="64008" marR="64008" marT="64008" marB="64008" anchor="mid">
                     <a:lnL w="8890" cap="flat" cmpd="sng" algn="ctr">
                       <a:solidFill>
                         <a:srgbClr val="D7DCE2"/>
@@ -10564,7 +10564,7 @@
                       </a:endParaRPr>
                     </a:p>
                   </a:txBody>
-                  <a:tcPr marL="64008" marR="64008" marT="64008" marB="64008" anchor="ctr">
+                  <a:tcPr marL="64008" marR="64008" marT="64008" marB="64008" anchor="mid">
                     <a:lnL w="8890" cap="flat" cmpd="sng" algn="ctr">
                       <a:solidFill>
                         <a:srgbClr val="D7DCE2"/>
@@ -10632,7 +10632,7 @@
                       </a:endParaRPr>
                     </a:p>
                   </a:txBody>
-                  <a:tcPr marL="64008" marR="64008" marT="64008" marB="64008" anchor="ctr">
+                  <a:tcPr marL="64008" marR="64008" marT="64008" marB="64008" anchor="mid">
                     <a:lnL w="8890" cap="flat" cmpd="sng" algn="ctr">
                       <a:solidFill>
                         <a:srgbClr val="D7DCE2"/>
@@ -10700,7 +10700,7 @@
                       </a:endParaRPr>
                     </a:p>
                   </a:txBody>
-                  <a:tcPr marL="64008" marR="64008" marT="64008" marB="64008" anchor="ctr">
+                  <a:tcPr marL="64008" marR="64008" marT="64008" marB="64008" anchor="mid">
                     <a:lnL w="8890" cap="flat" cmpd="sng" algn="ctr">
                       <a:solidFill>
                         <a:srgbClr val="D7DCE2"/>
@@ -10770,7 +10770,7 @@
                       </a:endParaRPr>
                     </a:p>
                   </a:txBody>
-                  <a:tcPr marL="64008" marR="64008" marT="64008" marB="64008" anchor="ctr">
+                  <a:tcPr marL="64008" marR="64008" marT="64008" marB="64008" anchor="mid">
                     <a:lnL w="8890" cap="flat" cmpd="sng" algn="ctr">
                       <a:solidFill>
                         <a:srgbClr val="D7DCE2"/>
@@ -10838,7 +10838,7 @@
                       </a:endParaRPr>
                     </a:p>
                   </a:txBody>
-                  <a:tcPr marL="64008" marR="64008" marT="64008" marB="64008" anchor="ctr">
+                  <a:tcPr marL="64008" marR="64008" marT="64008" marB="64008" anchor="mid">
                     <a:lnL w="8890" cap="flat" cmpd="sng" algn="ctr">
                       <a:solidFill>
                         <a:srgbClr val="D7DCE2"/>
@@ -10906,7 +10906,7 @@
                       </a:endParaRPr>
                     </a:p>
                   </a:txBody>
-                  <a:tcPr marL="64008" marR="64008" marT="64008" marB="64008" anchor="ctr">
+                  <a:tcPr marL="64008" marR="64008" marT="64008" marB="64008" anchor="mid">
                     <a:lnL w="8890" cap="flat" cmpd="sng" algn="ctr">
                       <a:solidFill>
                         <a:srgbClr val="D7DCE2"/>
@@ -10974,7 +10974,7 @@
                       </a:endParaRPr>
                     </a:p>
                   </a:txBody>
-                  <a:tcPr marL="64008" marR="64008" marT="64008" marB="64008" anchor="ctr">
+                  <a:tcPr marL="64008" marR="64008" marT="64008" marB="64008" anchor="mid">
                     <a:lnL w="8890" cap="flat" cmpd="sng" algn="ctr">
                       <a:solidFill>
                         <a:srgbClr val="D7DCE2"/>
@@ -11044,7 +11044,7 @@
                       </a:endParaRPr>
                     </a:p>
                   </a:txBody>
-                  <a:tcPr marL="64008" marR="64008" marT="64008" marB="64008" anchor="ctr">
+                  <a:tcPr marL="64008" marR="64008" marT="64008" marB="64008" anchor="mid">
                     <a:lnL w="8890" cap="flat" cmpd="sng" algn="ctr">
                       <a:solidFill>
                         <a:srgbClr val="D7DCE2"/>
@@ -11112,7 +11112,7 @@
                       </a:endParaRPr>
                     </a:p>
                   </a:txBody>
-                  <a:tcPr marL="64008" marR="64008" marT="64008" marB="64008" anchor="ctr">
+                  <a:tcPr marL="64008" marR="64008" marT="64008" marB="64008" anchor="mid">
                     <a:lnL w="8890" cap="flat" cmpd="sng" algn="ctr">
                       <a:solidFill>
                         <a:srgbClr val="D7DCE2"/>
@@ -11180,7 +11180,7 @@
                       </a:endParaRPr>
                     </a:p>
                   </a:txBody>
-                  <a:tcPr marL="64008" marR="64008" marT="64008" marB="64008" anchor="ctr">
+                  <a:tcPr marL="64008" marR="64008" marT="64008" marB="64008" anchor="mid">
                     <a:lnL w="8890" cap="flat" cmpd="sng" algn="ctr">
                       <a:solidFill>
                         <a:srgbClr val="D7DCE2"/>
@@ -11248,7 +11248,7 @@
                       </a:endParaRPr>
                     </a:p>
                   </a:txBody>
-                  <a:tcPr marL="64008" marR="64008" marT="64008" marB="64008" anchor="ctr">
+                  <a:tcPr marL="64008" marR="64008" marT="64008" marB="64008" anchor="mid">
                     <a:lnL w="8890" cap="flat" cmpd="sng" algn="ctr">
                       <a:solidFill>
                         <a:srgbClr val="D7DCE2"/>
@@ -11318,7 +11318,7 @@
                       </a:endParaRPr>
                     </a:p>
                   </a:txBody>
-                  <a:tcPr marL="64008" marR="64008" marT="64008" marB="64008" anchor="ctr">
+                  <a:tcPr marL="64008" marR="64008" marT="64008" marB="64008" anchor="mid">
                     <a:lnL w="8890" cap="flat" cmpd="sng" algn="ctr">
                       <a:solidFill>
                         <a:srgbClr val="D7DCE2"/>
@@ -11386,7 +11386,7 @@
                       </a:endParaRPr>
                     </a:p>
                   </a:txBody>
-                  <a:tcPr marL="64008" marR="64008" marT="64008" marB="64008" anchor="ctr">
+                  <a:tcPr marL="64008" marR="64008" marT="64008" marB="64008" anchor="mid">
                     <a:lnL w="8890" cap="flat" cmpd="sng" algn="ctr">
                       <a:solidFill>
                         <a:srgbClr val="D7DCE2"/>
@@ -11454,7 +11454,7 @@
                       </a:endParaRPr>
                     </a:p>
                   </a:txBody>
-                  <a:tcPr marL="64008" marR="64008" marT="64008" marB="64008" anchor="ctr">
+                  <a:tcPr marL="64008" marR="64008" marT="64008" marB="64008" anchor="mid">
                     <a:lnL w="8890" cap="flat" cmpd="sng" algn="ctr">
                       <a:solidFill>
                         <a:srgbClr val="D7DCE2"/>
@@ -11522,7 +11522,7 @@
                       </a:endParaRPr>
                     </a:p>
                   </a:txBody>
-                  <a:tcPr marL="64008" marR="64008" marT="64008" marB="64008" anchor="ctr">
+                  <a:tcPr marL="64008" marR="64008" marT="64008" marB="64008" anchor="mid">
                     <a:lnL w="8890" cap="flat" cmpd="sng" algn="ctr">
                       <a:solidFill>
                         <a:srgbClr val="D7DCE2"/>
@@ -11592,7 +11592,7 @@
                       </a:endParaRPr>
                     </a:p>
                   </a:txBody>
-                  <a:tcPr marL="64008" marR="64008" marT="64008" marB="64008" anchor="ctr">
+                  <a:tcPr marL="64008" marR="64008" marT="64008" marB="64008" anchor="mid">
                     <a:lnL w="8890" cap="flat" cmpd="sng" algn="ctr">
                       <a:solidFill>
                         <a:srgbClr val="D7DCE2"/>
@@ -11660,7 +11660,7 @@
                       </a:endParaRPr>
                     </a:p>
                   </a:txBody>
-                  <a:tcPr marL="64008" marR="64008" marT="64008" marB="64008" anchor="ctr">
+                  <a:tcPr marL="64008" marR="64008" marT="64008" marB="64008" anchor="mid">
                     <a:lnL w="8890" cap="flat" cmpd="sng" algn="ctr">
                       <a:solidFill>
                         <a:srgbClr val="D7DCE2"/>
@@ -11728,7 +11728,7 @@
                       </a:endParaRPr>
                     </a:p>
                   </a:txBody>
-                  <a:tcPr marL="64008" marR="64008" marT="64008" marB="64008" anchor="ctr">
+                  <a:tcPr marL="64008" marR="64008" marT="64008" marB="64008" anchor="mid">
                     <a:lnL w="8890" cap="flat" cmpd="sng" algn="ctr">
                       <a:solidFill>
                         <a:srgbClr val="D7DCE2"/>
@@ -11796,7 +11796,7 @@
                       </a:endParaRPr>
                     </a:p>
                   </a:txBody>
-                  <a:tcPr marL="64008" marR="64008" marT="64008" marB="64008" anchor="ctr">
+                  <a:tcPr marL="64008" marR="64008" marT="64008" marB="64008" anchor="mid">
                     <a:lnL w="8890" cap="flat" cmpd="sng" algn="ctr">
                       <a:solidFill>
                         <a:srgbClr val="D7DCE2"/>
@@ -12250,7 +12250,7 @@
         </p:nvGraphicFramePr>
         <p:xfrm>
           <a:off x="502920" y="1508760"/>
-          <a:ext cx="11201400" cy="3360000"/>
+          <a:ext cx="11201400" cy="3703320"/>
         </p:xfrm>
         <a:graphic>
           <a:graphicData uri="http://schemas.openxmlformats.org/drawingml/2006/table">
@@ -12261,7 +12261,7 @@
                 <a:gridCol w="2331720"/>
                 <a:gridCol w="4206240"/>
               </a:tblGrid>
-              <a:tr h="420000">
+              <a:tr h="462915">
                 <a:tc>
                   <a:txBody>
                     <a:bodyPr/>
@@ -12288,7 +12288,7 @@
                       </a:endParaRPr>
                     </a:p>
                   </a:txBody>
-                  <a:tcPr marL="64008" marR="64008" marT="64008" marB="64008" anchor="ctr">
+                  <a:tcPr marL="64008" marR="64008" marT="64008" marB="64008" anchor="mid">
                     <a:lnL w="8890" cap="flat" cmpd="sng" algn="ctr">
                       <a:solidFill>
                         <a:srgbClr val="D7DCE2"/>
@@ -12356,7 +12356,7 @@
                       </a:endParaRPr>
                     </a:p>
                   </a:txBody>
-                  <a:tcPr marL="64008" marR="64008" marT="64008" marB="64008" anchor="ctr">
+                  <a:tcPr marL="64008" marR="64008" marT="64008" marB="64008" anchor="mid">
                     <a:lnL w="8890" cap="flat" cmpd="sng" algn="ctr">
                       <a:solidFill>
                         <a:srgbClr val="D7DCE2"/>
@@ -12424,7 +12424,7 @@
                       </a:endParaRPr>
                     </a:p>
                   </a:txBody>
-                  <a:tcPr marL="64008" marR="64008" marT="64008" marB="64008" anchor="ctr">
+                  <a:tcPr marL="64008" marR="64008" marT="64008" marB="64008" anchor="mid">
                     <a:lnL w="8890" cap="flat" cmpd="sng" algn="ctr">
                       <a:solidFill>
                         <a:srgbClr val="D7DCE2"/>
@@ -12467,7 +12467,7 @@
                   </a:tcPr>
                 </a:tc>
               </a:tr>
-              <a:tr h="420000">
+              <a:tr h="462915">
                 <a:tc>
                   <a:txBody>
                     <a:bodyPr/>
@@ -12494,7 +12494,7 @@
                       </a:endParaRPr>
                     </a:p>
                   </a:txBody>
-                  <a:tcPr marL="64008" marR="64008" marT="64008" marB="64008" anchor="ctr">
+                  <a:tcPr marL="64008" marR="64008" marT="64008" marB="64008" anchor="mid">
                     <a:lnL w="8890" cap="flat" cmpd="sng" algn="ctr">
                       <a:solidFill>
                         <a:srgbClr val="D7DCE2"/>
@@ -12562,7 +12562,7 @@
                       </a:endParaRPr>
                     </a:p>
                   </a:txBody>
-                  <a:tcPr marL="64008" marR="64008" marT="64008" marB="64008" anchor="ctr">
+                  <a:tcPr marL="64008" marR="64008" marT="64008" marB="64008" anchor="mid">
                     <a:lnL w="8890" cap="flat" cmpd="sng" algn="ctr">
                       <a:solidFill>
                         <a:srgbClr val="D7DCE2"/>
@@ -12630,7 +12630,7 @@
                       </a:endParaRPr>
                     </a:p>
                   </a:txBody>
-                  <a:tcPr marL="64008" marR="64008" marT="64008" marB="64008" anchor="ctr">
+                  <a:tcPr marL="64008" marR="64008" marT="64008" marB="64008" anchor="mid">
                     <a:lnL w="8890" cap="flat" cmpd="sng" algn="ctr">
                       <a:solidFill>
                         <a:srgbClr val="D7DCE2"/>
@@ -12673,7 +12673,7 @@
                   </a:tcPr>
                 </a:tc>
               </a:tr>
-              <a:tr h="420000">
+              <a:tr h="462915">
                 <a:tc>
                   <a:txBody>
                     <a:bodyPr/>
@@ -12700,7 +12700,7 @@
                       </a:endParaRPr>
                     </a:p>
                   </a:txBody>
-                  <a:tcPr marL="64008" marR="64008" marT="64008" marB="64008" anchor="ctr">
+                  <a:tcPr marL="64008" marR="64008" marT="64008" marB="64008" anchor="mid">
                     <a:lnL w="8890" cap="flat" cmpd="sng" algn="ctr">
                       <a:solidFill>
                         <a:srgbClr val="D7DCE2"/>
@@ -12768,7 +12768,7 @@
                       </a:endParaRPr>
                     </a:p>
                   </a:txBody>
-                  <a:tcPr marL="64008" marR="64008" marT="64008" marB="64008" anchor="ctr">
+                  <a:tcPr marL="64008" marR="64008" marT="64008" marB="64008" anchor="mid">
                     <a:lnL w="8890" cap="flat" cmpd="sng" algn="ctr">
                       <a:solidFill>
                         <a:srgbClr val="D7DCE2"/>
@@ -12836,7 +12836,7 @@
                       </a:endParaRPr>
                     </a:p>
                   </a:txBody>
-                  <a:tcPr marL="64008" marR="64008" marT="64008" marB="64008" anchor="ctr">
+                  <a:tcPr marL="64008" marR="64008" marT="64008" marB="64008" anchor="mid">
                     <a:lnL w="8890" cap="flat" cmpd="sng" algn="ctr">
                       <a:solidFill>
                         <a:srgbClr val="D7DCE2"/>
@@ -12879,7 +12879,7 @@
                   </a:tcPr>
                 </a:tc>
               </a:tr>
-              <a:tr h="420000">
+              <a:tr h="462915">
                 <a:tc>
                   <a:txBody>
                     <a:bodyPr/>
@@ -12906,7 +12906,7 @@
                       </a:endParaRPr>
                     </a:p>
                   </a:txBody>
-                  <a:tcPr marL="64008" marR="64008" marT="64008" marB="64008" anchor="ctr">
+                  <a:tcPr marL="64008" marR="64008" marT="64008" marB="64008" anchor="mid">
                     <a:lnL w="8890" cap="flat" cmpd="sng" algn="ctr">
                       <a:solidFill>
                         <a:srgbClr val="D7DCE2"/>
@@ -12974,7 +12974,7 @@
                       </a:endParaRPr>
                     </a:p>
                   </a:txBody>
-                  <a:tcPr marL="64008" marR="64008" marT="64008" marB="64008" anchor="ctr">
+                  <a:tcPr marL="64008" marR="64008" marT="64008" marB="64008" anchor="mid">
                     <a:lnL w="8890" cap="flat" cmpd="sng" algn="ctr">
                       <a:solidFill>
                         <a:srgbClr val="D7DCE2"/>
@@ -13042,7 +13042,7 @@
                       </a:endParaRPr>
                     </a:p>
                   </a:txBody>
-                  <a:tcPr marL="64008" marR="64008" marT="64008" marB="64008" anchor="ctr">
+                  <a:tcPr marL="64008" marR="64008" marT="64008" marB="64008" anchor="mid">
                     <a:lnL w="8890" cap="flat" cmpd="sng" algn="ctr">
                       <a:solidFill>
                         <a:srgbClr val="D7DCE2"/>
@@ -13085,7 +13085,7 @@
                   </a:tcPr>
                 </a:tc>
               </a:tr>
-              <a:tr h="420000">
+              <a:tr h="462915">
                 <a:tc>
                   <a:txBody>
                     <a:bodyPr/>
@@ -13112,7 +13112,7 @@
                       </a:endParaRPr>
                     </a:p>
                   </a:txBody>
-                  <a:tcPr marL="64008" marR="64008" marT="64008" marB="64008" anchor="ctr">
+                  <a:tcPr marL="64008" marR="64008" marT="64008" marB="64008" anchor="mid">
                     <a:lnL w="8890" cap="flat" cmpd="sng" algn="ctr">
                       <a:solidFill>
                         <a:srgbClr val="D7DCE2"/>
@@ -13180,7 +13180,7 @@
                       </a:endParaRPr>
                     </a:p>
                   </a:txBody>
-                  <a:tcPr marL="64008" marR="64008" marT="64008" marB="64008" anchor="ctr">
+                  <a:tcPr marL="64008" marR="64008" marT="64008" marB="64008" anchor="mid">
                     <a:lnL w="8890" cap="flat" cmpd="sng" algn="ctr">
                       <a:solidFill>
                         <a:srgbClr val="D7DCE2"/>
@@ -13248,7 +13248,7 @@
                       </a:endParaRPr>
                     </a:p>
                   </a:txBody>
-                  <a:tcPr marL="64008" marR="64008" marT="64008" marB="64008" anchor="ctr">
+                  <a:tcPr marL="64008" marR="64008" marT="64008" marB="64008" anchor="mid">
                     <a:lnL w="8890" cap="flat" cmpd="sng" algn="ctr">
                       <a:solidFill>
                         <a:srgbClr val="D7DCE2"/>
@@ -13291,7 +13291,7 @@
                   </a:tcPr>
                 </a:tc>
               </a:tr>
-              <a:tr h="420000">
+              <a:tr h="462915">
                 <a:tc>
                   <a:txBody>
                     <a:bodyPr/>
@@ -13318,7 +13318,7 @@
                       </a:endParaRPr>
                     </a:p>
                   </a:txBody>
-                  <a:tcPr marL="64008" marR="64008" marT="64008" marB="64008" anchor="ctr">
+                  <a:tcPr marL="64008" marR="64008" marT="64008" marB="64008" anchor="mid">
                     <a:lnL w="8890" cap="flat" cmpd="sng" algn="ctr">
                       <a:solidFill>
                         <a:srgbClr val="D7DCE2"/>
@@ -13386,7 +13386,7 @@
                       </a:endParaRPr>
                     </a:p>
                   </a:txBody>
-                  <a:tcPr marL="64008" marR="64008" marT="64008" marB="64008" anchor="ctr">
+                  <a:tcPr marL="64008" marR="64008" marT="64008" marB="64008" anchor="mid">
                     <a:lnL w="8890" cap="flat" cmpd="sng" algn="ctr">
                       <a:solidFill>
                         <a:srgbClr val="D7DCE2"/>
@@ -13454,7 +13454,7 @@
                       </a:endParaRPr>
                     </a:p>
                   </a:txBody>
-                  <a:tcPr marL="64008" marR="64008" marT="64008" marB="64008" anchor="ctr">
+                  <a:tcPr marL="64008" marR="64008" marT="64008" marB="64008" anchor="mid">
                     <a:lnL w="8890" cap="flat" cmpd="sng" algn="ctr">
                       <a:solidFill>
                         <a:srgbClr val="D7DCE2"/>
@@ -13497,7 +13497,7 @@
                   </a:tcPr>
                 </a:tc>
               </a:tr>
-              <a:tr h="420000">
+              <a:tr h="462915">
                 <a:tc>
                   <a:txBody>
                     <a:bodyPr/>
@@ -13524,7 +13524,7 @@
                       </a:endParaRPr>
                     </a:p>
                   </a:txBody>
-                  <a:tcPr marL="64008" marR="64008" marT="64008" marB="64008" anchor="ctr">
+                  <a:tcPr marL="64008" marR="64008" marT="64008" marB="64008" anchor="mid">
                     <a:lnL w="8890" cap="flat" cmpd="sng" algn="ctr">
                       <a:solidFill>
                         <a:srgbClr val="D7DCE2"/>
@@ -13592,7 +13592,7 @@
                       </a:endParaRPr>
                     </a:p>
                   </a:txBody>
-                  <a:tcPr marL="64008" marR="64008" marT="64008" marB="64008" anchor="ctr">
+                  <a:tcPr marL="64008" marR="64008" marT="64008" marB="64008" anchor="mid">
                     <a:lnL w="8890" cap="flat" cmpd="sng" algn="ctr">
                       <a:solidFill>
                         <a:srgbClr val="D7DCE2"/>
@@ -13660,7 +13660,7 @@
                       </a:endParaRPr>
                     </a:p>
                   </a:txBody>
-                  <a:tcPr marL="64008" marR="64008" marT="64008" marB="64008" anchor="ctr">
+                  <a:tcPr marL="64008" marR="64008" marT="64008" marB="64008" anchor="mid">
                     <a:lnL w="8890" cap="flat" cmpd="sng" algn="ctr">
                       <a:solidFill>
                         <a:srgbClr val="D7DCE2"/>
@@ -13703,7 +13703,7 @@
                   </a:tcPr>
                 </a:tc>
               </a:tr>
-              <a:tr h="420000">
+              <a:tr h="462915">
                 <a:tc>
                   <a:txBody>
                     <a:bodyPr/>
@@ -13730,7 +13730,7 @@
                       </a:endParaRPr>
                     </a:p>
                   </a:txBody>
-                  <a:tcPr marL="64008" marR="64008" marT="64008" marB="64008" anchor="ctr">
+                  <a:tcPr marL="64008" marR="64008" marT="64008" marB="64008" anchor="mid">
                     <a:lnL w="8890" cap="flat" cmpd="sng" algn="ctr">
                       <a:solidFill>
                         <a:srgbClr val="D7DCE2"/>
@@ -13798,7 +13798,7 @@
                       </a:endParaRPr>
                     </a:p>
                   </a:txBody>
-                  <a:tcPr marL="64008" marR="64008" marT="64008" marB="64008" anchor="ctr">
+                  <a:tcPr marL="64008" marR="64008" marT="64008" marB="64008" anchor="mid">
                     <a:lnL w="8890" cap="flat" cmpd="sng" algn="ctr">
                       <a:solidFill>
                         <a:srgbClr val="D7DCE2"/>
@@ -13866,7 +13866,7 @@
                       </a:endParaRPr>
                     </a:p>
                   </a:txBody>
-                  <a:tcPr marL="64008" marR="64008" marT="64008" marB="64008" anchor="ctr">
+                  <a:tcPr marL="64008" marR="64008" marT="64008" marB="64008" anchor="mid">
                     <a:lnL w="8890" cap="flat" cmpd="sng" algn="ctr">
                       <a:solidFill>
                         <a:srgbClr val="D7DCE2"/>
@@ -13921,8 +13921,8 @@
         </p:nvSpPr>
         <p:spPr>
           <a:xfrm>
-            <a:off x="685800" y="5097360"/>
-            <a:ext cx="5166360" cy="1005840"/>
+            <a:off x="685800" y="5468112"/>
+            <a:ext cx="5166360" cy="731520"/>
           </a:xfrm>
           <a:prstGeom prst="roundRect">
             <a:avLst>
@@ -13942,13 +13942,13 @@
       </p:sp>
       <p:sp>
         <p:nvSpPr>
-          <p:cNvPr id="16" name="Text 4"/>
+          <p:cNvPr id="8" name="Text 4"/>
           <p:cNvSpPr/>
           <p:nvPr/>
         </p:nvSpPr>
         <p:spPr>
           <a:xfrm>
-            <a:off x="850392" y="5261952"/>
+            <a:off x="850392" y="5632704"/>
             <a:ext cx="4837176" cy="274320"/>
           </a:xfrm>
           <a:prstGeom prst="rect">
@@ -13986,8 +13986,8 @@
         </p:nvSpPr>
         <p:spPr>
           <a:xfrm>
-            <a:off x="850392" y="5646000"/>
-            <a:ext cx="4837176" cy="365760"/>
+            <a:off x="850392" y="6016752"/>
+            <a:ext cx="4837176" cy="18288"/>
           </a:xfrm>
           <a:prstGeom prst="rect">
             <a:avLst/>
@@ -14024,8 +14024,8 @@
         </p:nvSpPr>
         <p:spPr>
           <a:xfrm>
-            <a:off x="6263640" y="5097360"/>
-            <a:ext cx="5166360" cy="1005840"/>
+            <a:off x="6263640" y="5468112"/>
+            <a:ext cx="5166360" cy="731520"/>
           </a:xfrm>
           <a:prstGeom prst="roundRect">
             <a:avLst>
@@ -14051,7 +14051,7 @@
         </p:nvSpPr>
         <p:spPr>
           <a:xfrm>
-            <a:off x="6428232" y="5261952"/>
+            <a:off x="6428232" y="5632704"/>
             <a:ext cx="4837176" cy="274320"/>
           </a:xfrm>
           <a:prstGeom prst="rect">
@@ -14089,8 +14089,8 @@
         </p:nvSpPr>
         <p:spPr>
           <a:xfrm>
-            <a:off x="6428232" y="5646000"/>
-            <a:ext cx="4837176" cy="365760"/>
+            <a:off x="6428232" y="6016752"/>
+            <a:ext cx="4837176" cy="18288"/>
           </a:xfrm>
           <a:prstGeom prst="rect">
             <a:avLst/>
@@ -14425,7 +14425,7 @@
                       </a:endParaRPr>
                     </a:p>
                   </a:txBody>
-                  <a:tcPr marL="64008" marR="64008" marT="64008" marB="64008" anchor="ctr">
+                  <a:tcPr marL="64008" marR="64008" marT="64008" marB="64008" anchor="mid">
                     <a:lnL w="8890" cap="flat" cmpd="sng" algn="ctr">
                       <a:solidFill>
                         <a:srgbClr val="D7DCE2"/>
@@ -14493,7 +14493,7 @@
                       </a:endParaRPr>
                     </a:p>
                   </a:txBody>
-                  <a:tcPr marL="64008" marR="64008" marT="64008" marB="64008" anchor="ctr">
+                  <a:tcPr marL="64008" marR="64008" marT="64008" marB="64008" anchor="mid">
                     <a:lnL w="8890" cap="flat" cmpd="sng" algn="ctr">
                       <a:solidFill>
                         <a:srgbClr val="D7DCE2"/>
@@ -14563,7 +14563,7 @@
                       </a:endParaRPr>
                     </a:p>
                   </a:txBody>
-                  <a:tcPr marL="64008" marR="64008" marT="64008" marB="64008" anchor="ctr">
+                  <a:tcPr marL="64008" marR="64008" marT="64008" marB="64008" anchor="mid">
                     <a:lnL w="8890" cap="flat" cmpd="sng" algn="ctr">
                       <a:solidFill>
                         <a:srgbClr val="D7DCE2"/>
@@ -14631,7 +14631,7 @@
                       </a:endParaRPr>
                     </a:p>
                   </a:txBody>
-                  <a:tcPr marL="64008" marR="64008" marT="64008" marB="64008" anchor="ctr">
+                  <a:tcPr marL="64008" marR="64008" marT="64008" marB="64008" anchor="mid">
                     <a:lnL w="8890" cap="flat" cmpd="sng" algn="ctr">
                       <a:solidFill>
                         <a:srgbClr val="D7DCE2"/>
@@ -14701,7 +14701,7 @@
                       </a:endParaRPr>
                     </a:p>
                   </a:txBody>
-                  <a:tcPr marL="64008" marR="64008" marT="64008" marB="64008" anchor="ctr">
+                  <a:tcPr marL="64008" marR="64008" marT="64008" marB="64008" anchor="mid">
                     <a:lnL w="8890" cap="flat" cmpd="sng" algn="ctr">
                       <a:solidFill>
                         <a:srgbClr val="D7DCE2"/>
@@ -14769,7 +14769,7 @@
                       </a:endParaRPr>
                     </a:p>
                   </a:txBody>
-                  <a:tcPr marL="64008" marR="64008" marT="64008" marB="64008" anchor="ctr">
+                  <a:tcPr marL="64008" marR="64008" marT="64008" marB="64008" anchor="mid">
                     <a:lnL w="8890" cap="flat" cmpd="sng" algn="ctr">
                       <a:solidFill>
                         <a:srgbClr val="D7DCE2"/>
@@ -14839,7 +14839,7 @@
                       </a:endParaRPr>
                     </a:p>
                   </a:txBody>
-                  <a:tcPr marL="64008" marR="64008" marT="64008" marB="64008" anchor="ctr">
+                  <a:tcPr marL="64008" marR="64008" marT="64008" marB="64008" anchor="mid">
                     <a:lnL w="8890" cap="flat" cmpd="sng" algn="ctr">
                       <a:solidFill>
                         <a:srgbClr val="D7DCE2"/>
@@ -14907,7 +14907,7 @@
                       </a:endParaRPr>
                     </a:p>
                   </a:txBody>
-                  <a:tcPr marL="64008" marR="64008" marT="64008" marB="64008" anchor="ctr">
+                  <a:tcPr marL="64008" marR="64008" marT="64008" marB="64008" anchor="mid">
                     <a:lnL w="8890" cap="flat" cmpd="sng" algn="ctr">
                       <a:solidFill>
                         <a:srgbClr val="D7DCE2"/>
@@ -14977,7 +14977,7 @@
                       </a:endParaRPr>
                     </a:p>
                   </a:txBody>
-                  <a:tcPr marL="64008" marR="64008" marT="64008" marB="64008" anchor="ctr">
+                  <a:tcPr marL="64008" marR="64008" marT="64008" marB="64008" anchor="mid">
                     <a:lnL w="8890" cap="flat" cmpd="sng" algn="ctr">
                       <a:solidFill>
                         <a:srgbClr val="D7DCE2"/>
@@ -15045,7 +15045,7 @@
                       </a:endParaRPr>
                     </a:p>
                   </a:txBody>
-                  <a:tcPr marL="64008" marR="64008" marT="64008" marB="64008" anchor="ctr">
+                  <a:tcPr marL="64008" marR="64008" marT="64008" marB="64008" anchor="mid">
                     <a:lnL w="8890" cap="flat" cmpd="sng" algn="ctr">
                       <a:solidFill>
                         <a:srgbClr val="D7DCE2"/>
@@ -15115,7 +15115,7 @@
                       </a:endParaRPr>
                     </a:p>
                   </a:txBody>
-                  <a:tcPr marL="64008" marR="64008" marT="64008" marB="64008" anchor="ctr">
+                  <a:tcPr marL="64008" marR="64008" marT="64008" marB="64008" anchor="mid">
                     <a:lnL w="8890" cap="flat" cmpd="sng" algn="ctr">
                       <a:solidFill>
                         <a:srgbClr val="D7DCE2"/>
@@ -15183,7 +15183,7 @@
                       </a:endParaRPr>
                     </a:p>
                   </a:txBody>
-                  <a:tcPr marL="64008" marR="64008" marT="64008" marB="64008" anchor="ctr">
+                  <a:tcPr marL="64008" marR="64008" marT="64008" marB="64008" anchor="mid">
                     <a:lnL w="8890" cap="flat" cmpd="sng" algn="ctr">
                       <a:solidFill>
                         <a:srgbClr val="D7DCE2"/>
@@ -15253,7 +15253,7 @@
                       </a:endParaRPr>
                     </a:p>
                   </a:txBody>
-                  <a:tcPr marL="64008" marR="64008" marT="64008" marB="64008" anchor="ctr">
+                  <a:tcPr marL="64008" marR="64008" marT="64008" marB="64008" anchor="mid">
                     <a:lnL w="8890" cap="flat" cmpd="sng" algn="ctr">
                       <a:solidFill>
                         <a:srgbClr val="D7DCE2"/>
@@ -15321,7 +15321,7 @@
                       </a:endParaRPr>
                     </a:p>
                   </a:txBody>
-                  <a:tcPr marL="64008" marR="64008" marT="64008" marB="64008" anchor="ctr">
+                  <a:tcPr marL="64008" marR="64008" marT="64008" marB="64008" anchor="mid">
                     <a:lnL w="8890" cap="flat" cmpd="sng" algn="ctr">
                       <a:solidFill>
                         <a:srgbClr val="D7DCE2"/>
@@ -15429,7 +15429,7 @@
       </p:sp>
       <p:sp>
         <p:nvSpPr>
-          <p:cNvPr id="11" name="Text 5"/>
+          <p:cNvPr id="9" name="Text 5"/>
           <p:cNvSpPr/>
           <p:nvPr/>
         </p:nvSpPr>
@@ -15711,7 +15711,7 @@
                       </a:endParaRPr>
                     </a:p>
                   </a:txBody>
-                  <a:tcPr marL="64008" marR="64008" marT="64008" marB="64008" anchor="ctr">
+                  <a:tcPr marL="64008" marR="64008" marT="64008" marB="64008" anchor="mid">
                     <a:lnL w="8890" cap="flat" cmpd="sng" algn="ctr">
                       <a:solidFill>
                         <a:srgbClr val="D7DCE2"/>
@@ -15779,7 +15779,7 @@
                       </a:endParaRPr>
                     </a:p>
                   </a:txBody>
-                  <a:tcPr marL="64008" marR="64008" marT="64008" marB="64008" anchor="ctr">
+                  <a:tcPr marL="64008" marR="64008" marT="64008" marB="64008" anchor="mid">
                     <a:lnL w="8890" cap="flat" cmpd="sng" algn="ctr">
                       <a:solidFill>
                         <a:srgbClr val="D7DCE2"/>
@@ -15847,7 +15847,7 @@
                       </a:endParaRPr>
                     </a:p>
                   </a:txBody>
-                  <a:tcPr marL="64008" marR="64008" marT="64008" marB="64008" anchor="ctr">
+                  <a:tcPr marL="64008" marR="64008" marT="64008" marB="64008" anchor="mid">
                     <a:lnL w="8890" cap="flat" cmpd="sng" algn="ctr">
                       <a:solidFill>
                         <a:srgbClr val="D7DCE2"/>
@@ -15917,7 +15917,7 @@
                       </a:endParaRPr>
                     </a:p>
                   </a:txBody>
-                  <a:tcPr marL="64008" marR="64008" marT="64008" marB="64008" anchor="ctr">
+                  <a:tcPr marL="64008" marR="64008" marT="64008" marB="64008" anchor="mid">
                     <a:lnL w="8890" cap="flat" cmpd="sng" algn="ctr">
                       <a:solidFill>
                         <a:srgbClr val="D7DCE2"/>
@@ -15985,7 +15985,7 @@
                       </a:endParaRPr>
                     </a:p>
                   </a:txBody>
-                  <a:tcPr marL="64008" marR="64008" marT="64008" marB="64008" anchor="ctr">
+                  <a:tcPr marL="64008" marR="64008" marT="64008" marB="64008" anchor="mid">
                     <a:lnL w="8890" cap="flat" cmpd="sng" algn="ctr">
                       <a:solidFill>
                         <a:srgbClr val="D7DCE2"/>
@@ -16053,7 +16053,7 @@
                       </a:endParaRPr>
                     </a:p>
                   </a:txBody>
-                  <a:tcPr marL="64008" marR="64008" marT="64008" marB="64008" anchor="ctr">
+                  <a:tcPr marL="64008" marR="64008" marT="64008" marB="64008" anchor="mid">
                     <a:lnL w="8890" cap="flat" cmpd="sng" algn="ctr">
                       <a:solidFill>
                         <a:srgbClr val="D7DCE2"/>
@@ -16123,7 +16123,7 @@
                       </a:endParaRPr>
                     </a:p>
                   </a:txBody>
-                  <a:tcPr marL="64008" marR="64008" marT="64008" marB="64008" anchor="ctr">
+                  <a:tcPr marL="64008" marR="64008" marT="64008" marB="64008" anchor="mid">
                     <a:lnL w="8890" cap="flat" cmpd="sng" algn="ctr">
                       <a:solidFill>
                         <a:srgbClr val="D7DCE2"/>
@@ -16191,7 +16191,7 @@
                       </a:endParaRPr>
                     </a:p>
                   </a:txBody>
-                  <a:tcPr marL="64008" marR="64008" marT="64008" marB="64008" anchor="ctr">
+                  <a:tcPr marL="64008" marR="64008" marT="64008" marB="64008" anchor="mid">
                     <a:lnL w="8890" cap="flat" cmpd="sng" algn="ctr">
                       <a:solidFill>
                         <a:srgbClr val="D7DCE2"/>
@@ -16259,7 +16259,7 @@
                       </a:endParaRPr>
                     </a:p>
                   </a:txBody>
-                  <a:tcPr marL="64008" marR="64008" marT="64008" marB="64008" anchor="ctr">
+                  <a:tcPr marL="64008" marR="64008" marT="64008" marB="64008" anchor="mid">
                     <a:lnL w="8890" cap="flat" cmpd="sng" algn="ctr">
                       <a:solidFill>
                         <a:srgbClr val="D7DCE2"/>
@@ -16329,7 +16329,7 @@
                       </a:endParaRPr>
                     </a:p>
                   </a:txBody>
-                  <a:tcPr marL="64008" marR="64008" marT="64008" marB="64008" anchor="ctr">
+                  <a:tcPr marL="64008" marR="64008" marT="64008" marB="64008" anchor="mid">
                     <a:lnL w="8890" cap="flat" cmpd="sng" algn="ctr">
                       <a:solidFill>
                         <a:srgbClr val="D7DCE2"/>
@@ -16397,7 +16397,7 @@
                       </a:endParaRPr>
                     </a:p>
                   </a:txBody>
-                  <a:tcPr marL="64008" marR="64008" marT="64008" marB="64008" anchor="ctr">
+                  <a:tcPr marL="64008" marR="64008" marT="64008" marB="64008" anchor="mid">
                     <a:lnL w="8890" cap="flat" cmpd="sng" algn="ctr">
                       <a:solidFill>
                         <a:srgbClr val="D7DCE2"/>
@@ -16465,7 +16465,7 @@
                       </a:endParaRPr>
                     </a:p>
                   </a:txBody>
-                  <a:tcPr marL="64008" marR="64008" marT="64008" marB="64008" anchor="ctr">
+                  <a:tcPr marL="64008" marR="64008" marT="64008" marB="64008" anchor="mid">
                     <a:lnL w="8890" cap="flat" cmpd="sng" algn="ctr">
                       <a:solidFill>
                         <a:srgbClr val="D7DCE2"/>
@@ -16535,7 +16535,7 @@
                       </a:endParaRPr>
                     </a:p>
                   </a:txBody>
-                  <a:tcPr marL="64008" marR="64008" marT="64008" marB="64008" anchor="ctr">
+                  <a:tcPr marL="64008" marR="64008" marT="64008" marB="64008" anchor="mid">
                     <a:lnL w="8890" cap="flat" cmpd="sng" algn="ctr">
                       <a:solidFill>
                         <a:srgbClr val="D7DCE2"/>
@@ -16603,7 +16603,7 @@
                       </a:endParaRPr>
                     </a:p>
                   </a:txBody>
-                  <a:tcPr marL="64008" marR="64008" marT="64008" marB="64008" anchor="ctr">
+                  <a:tcPr marL="64008" marR="64008" marT="64008" marB="64008" anchor="mid">
                     <a:lnL w="8890" cap="flat" cmpd="sng" algn="ctr">
                       <a:solidFill>
                         <a:srgbClr val="D7DCE2"/>
@@ -16671,7 +16671,7 @@
                       </a:endParaRPr>
                     </a:p>
                   </a:txBody>
-                  <a:tcPr marL="64008" marR="64008" marT="64008" marB="64008" anchor="ctr">
+                  <a:tcPr marL="64008" marR="64008" marT="64008" marB="64008" anchor="mid">
                     <a:lnL w="8890" cap="flat" cmpd="sng" algn="ctr">
                       <a:solidFill>
                         <a:srgbClr val="D7DCE2"/>
@@ -16741,7 +16741,7 @@
                       </a:endParaRPr>
                     </a:p>
                   </a:txBody>
-                  <a:tcPr marL="64008" marR="64008" marT="64008" marB="64008" anchor="ctr">
+                  <a:tcPr marL="64008" marR="64008" marT="64008" marB="64008" anchor="mid">
                     <a:lnL w="8890" cap="flat" cmpd="sng" algn="ctr">
                       <a:solidFill>
                         <a:srgbClr val="D7DCE2"/>
@@ -16809,7 +16809,7 @@
                       </a:endParaRPr>
                     </a:p>
                   </a:txBody>
-                  <a:tcPr marL="64008" marR="64008" marT="64008" marB="64008" anchor="ctr">
+                  <a:tcPr marL="64008" marR="64008" marT="64008" marB="64008" anchor="mid">
                     <a:lnL w="8890" cap="flat" cmpd="sng" algn="ctr">
                       <a:solidFill>
                         <a:srgbClr val="D7DCE2"/>
@@ -16877,7 +16877,7 @@
                       </a:endParaRPr>
                     </a:p>
                   </a:txBody>
-                  <a:tcPr marL="64008" marR="64008" marT="64008" marB="64008" anchor="ctr">
+                  <a:tcPr marL="64008" marR="64008" marT="64008" marB="64008" anchor="mid">
                     <a:lnL w="8890" cap="flat" cmpd="sng" algn="ctr">
                       <a:solidFill>
                         <a:srgbClr val="D7DCE2"/>
@@ -16947,7 +16947,7 @@
                       </a:endParaRPr>
                     </a:p>
                   </a:txBody>
-                  <a:tcPr marL="64008" marR="64008" marT="64008" marB="64008" anchor="ctr">
+                  <a:tcPr marL="64008" marR="64008" marT="64008" marB="64008" anchor="mid">
                     <a:lnL w="8890" cap="flat" cmpd="sng" algn="ctr">
                       <a:solidFill>
                         <a:srgbClr val="D7DCE2"/>
@@ -17015,7 +17015,7 @@
                       </a:endParaRPr>
                     </a:p>
                   </a:txBody>
-                  <a:tcPr marL="64008" marR="64008" marT="64008" marB="64008" anchor="ctr">
+                  <a:tcPr marL="64008" marR="64008" marT="64008" marB="64008" anchor="mid">
                     <a:lnL w="8890" cap="flat" cmpd="sng" algn="ctr">
                       <a:solidFill>
                         <a:srgbClr val="D7DCE2"/>
@@ -17083,7 +17083,7 @@
                       </a:endParaRPr>
                     </a:p>
                   </a:txBody>
-                  <a:tcPr marL="64008" marR="64008" marT="64008" marB="64008" anchor="ctr">
+                  <a:tcPr marL="64008" marR="64008" marT="64008" marB="64008" anchor="mid">
                     <a:lnL w="8890" cap="flat" cmpd="sng" algn="ctr">
                       <a:solidFill>
                         <a:srgbClr val="D7DCE2"/>
@@ -17153,7 +17153,7 @@
                       </a:endParaRPr>
                     </a:p>
                   </a:txBody>
-                  <a:tcPr marL="64008" marR="64008" marT="64008" marB="64008" anchor="ctr">
+                  <a:tcPr marL="64008" marR="64008" marT="64008" marB="64008" anchor="mid">
                     <a:lnL w="8890" cap="flat" cmpd="sng" algn="ctr">
                       <a:solidFill>
                         <a:srgbClr val="D7DCE2"/>
@@ -17221,7 +17221,7 @@
                       </a:endParaRPr>
                     </a:p>
                   </a:txBody>
-                  <a:tcPr marL="64008" marR="64008" marT="64008" marB="64008" anchor="ctr">
+                  <a:tcPr marL="64008" marR="64008" marT="64008" marB="64008" anchor="mid">
                     <a:lnL w="8890" cap="flat" cmpd="sng" algn="ctr">
                       <a:solidFill>
                         <a:srgbClr val="D7DCE2"/>
@@ -17289,7 +17289,7 @@
                       </a:endParaRPr>
                     </a:p>
                   </a:txBody>
-                  <a:tcPr marL="64008" marR="64008" marT="64008" marB="64008" anchor="ctr">
+                  <a:tcPr marL="64008" marR="64008" marT="64008" marB="64008" anchor="mid">
                     <a:lnL w="8890" cap="flat" cmpd="sng" algn="ctr">
                       <a:solidFill>
                         <a:srgbClr val="D7DCE2"/>
@@ -17359,7 +17359,7 @@
                       </a:endParaRPr>
                     </a:p>
                   </a:txBody>
-                  <a:tcPr marL="64008" marR="64008" marT="64008" marB="64008" anchor="ctr">
+                  <a:tcPr marL="64008" marR="64008" marT="64008" marB="64008" anchor="mid">
                     <a:lnL w="8890" cap="flat" cmpd="sng" algn="ctr">
                       <a:solidFill>
                         <a:srgbClr val="D7DCE2"/>
@@ -17427,7 +17427,7 @@
                       </a:endParaRPr>
                     </a:p>
                   </a:txBody>
-                  <a:tcPr marL="64008" marR="64008" marT="64008" marB="64008" anchor="ctr">
+                  <a:tcPr marL="64008" marR="64008" marT="64008" marB="64008" anchor="mid">
                     <a:lnL w="8890" cap="flat" cmpd="sng" algn="ctr">
                       <a:solidFill>
                         <a:srgbClr val="D7DCE2"/>
@@ -17495,7 +17495,7 @@
                       </a:endParaRPr>
                     </a:p>
                   </a:txBody>
-                  <a:tcPr marL="64008" marR="64008" marT="64008" marB="64008" anchor="ctr">
+                  <a:tcPr marL="64008" marR="64008" marT="64008" marB="64008" anchor="mid">
                     <a:lnL w="8890" cap="flat" cmpd="sng" algn="ctr">
                       <a:solidFill>
                         <a:srgbClr val="D7DCE2"/>
@@ -17565,7 +17565,7 @@
                       </a:endParaRPr>
                     </a:p>
                   </a:txBody>
-                  <a:tcPr marL="64008" marR="64008" marT="64008" marB="64008" anchor="ctr">
+                  <a:tcPr marL="64008" marR="64008" marT="64008" marB="64008" anchor="mid">
                     <a:lnL w="8890" cap="flat" cmpd="sng" algn="ctr">
                       <a:solidFill>
                         <a:srgbClr val="D7DCE2"/>
@@ -17633,7 +17633,7 @@
                       </a:endParaRPr>
                     </a:p>
                   </a:txBody>
-                  <a:tcPr marL="64008" marR="64008" marT="64008" marB="64008" anchor="ctr">
+                  <a:tcPr marL="64008" marR="64008" marT="64008" marB="64008" anchor="mid">
                     <a:lnL w="8890" cap="flat" cmpd="sng" algn="ctr">
                       <a:solidFill>
                         <a:srgbClr val="D7DCE2"/>
@@ -17701,7 +17701,7 @@
                       </a:endParaRPr>
                     </a:p>
                   </a:txBody>
-                  <a:tcPr marL="64008" marR="64008" marT="64008" marB="64008" anchor="ctr">
+                  <a:tcPr marL="64008" marR="64008" marT="64008" marB="64008" anchor="mid">
                     <a:lnL w="8890" cap="flat" cmpd="sng" algn="ctr">
                       <a:solidFill>
                         <a:srgbClr val="D7DCE2"/>
